--- a/2022182034 임성진 REAL_VS_SUPER_최종 보고서(2차 발표).pptx
+++ b/2022182034 임성진 REAL_VS_SUPER_최종 보고서(2차 발표).pptx
@@ -4147,8 +4147,8 @@
         </p:nvSpPr>
         <p:spPr>
           <a:xfrm>
-            <a:off x="6095999" y="2017909"/>
-            <a:ext cx="3579827" cy="923330"/>
+            <a:off x="5940508" y="2017909"/>
+            <a:ext cx="3890809" cy="923330"/>
           </a:xfrm>
           <a:prstGeom prst="rect">
             <a:avLst/>
@@ -4162,26 +4162,6 @@
           <a:lstStyle/>
           <a:p>
             <a:pPr algn="ctr"/>
-            <a:r>
-              <a:rPr lang="en-US" altLang="ko-KR" sz="5400" b="1" cap="none" spc="0" dirty="0">
-                <a:ln w="0">
-                  <a:solidFill>
-                    <a:sysClr val="windowText" lastClr="000000"/>
-                  </a:solidFill>
-                </a:ln>
-                <a:solidFill>
-                  <a:schemeClr val="bg1"/>
-                </a:solidFill>
-                <a:effectLst>
-                  <a:outerShdw blurRad="38100" dist="19050" dir="2700000" algn="tl" rotWithShape="0">
-                    <a:schemeClr val="dk1">
-                      <a:alpha val="40000"/>
-                    </a:schemeClr>
-                  </a:outerShdw>
-                </a:effectLst>
-              </a:rPr>
-              <a:t>1</a:t>
-            </a:r>
             <a:r>
               <a:rPr lang="ko-KR" altLang="en-US" sz="5400" b="1" cap="none" spc="0" dirty="0">
                 <a:ln w="0">
@@ -4200,7 +4180,7 @@
                   </a:outerShdw>
                 </a:effectLst>
               </a:rPr>
-              <a:t>차 보고서</a:t>
+              <a:t>최종 보고서</a:t>
             </a:r>
             <a:endParaRPr lang="en-US" altLang="ko-KR" sz="5400" b="1" cap="none" spc="0" dirty="0">
               <a:ln w="0">
@@ -6468,6 +6448,1008 @@
           </a:p>
         </p:txBody>
       </p:sp>
+      <p:pic>
+        <p:nvPicPr>
+          <p:cNvPr id="4" name="그림 3" descr="텍스트, 스크린샷, 소프트웨어, 도표이(가) 표시된 사진&#10;&#10;AI 생성 콘텐츠는 정확하지 않을 수 있습니다.">
+            <a:extLst>
+              <a:ext uri="{FF2B5EF4-FFF2-40B4-BE49-F238E27FC236}">
+                <a16:creationId xmlns:a16="http://schemas.microsoft.com/office/drawing/2014/main" id="{F9585E81-AB81-6B31-3CC5-0D0629E72FAD}"/>
+              </a:ext>
+            </a:extLst>
+          </p:cNvPr>
+          <p:cNvPicPr>
+            <a:picLocks noChangeAspect="1"/>
+          </p:cNvPicPr>
+          <p:nvPr/>
+        </p:nvPicPr>
+        <p:blipFill>
+          <a:blip r:embed="rId3"/>
+          <a:stretch>
+            <a:fillRect/>
+          </a:stretch>
+        </p:blipFill>
+        <p:spPr>
+          <a:xfrm>
+            <a:off x="2432050" y="1416699"/>
+            <a:ext cx="9264650" cy="4443701"/>
+          </a:xfrm>
+          <a:prstGeom prst="rect">
+            <a:avLst/>
+          </a:prstGeom>
+        </p:spPr>
+      </p:pic>
+      <p:graphicFrame>
+        <p:nvGraphicFramePr>
+          <p:cNvPr id="5" name="표 4">
+            <a:extLst>
+              <a:ext uri="{FF2B5EF4-FFF2-40B4-BE49-F238E27FC236}">
+                <a16:creationId xmlns:a16="http://schemas.microsoft.com/office/drawing/2014/main" id="{E409C8E7-A223-BCAD-C3B6-C6EFAA69CB06}"/>
+              </a:ext>
+            </a:extLst>
+          </p:cNvPr>
+          <p:cNvGraphicFramePr>
+            <a:graphicFrameLocks noGrp="1"/>
+          </p:cNvGraphicFramePr>
+          <p:nvPr>
+            <p:extLst>
+              <p:ext uri="{D42A27DB-BD31-4B8C-83A1-F6EECF244321}">
+                <p14:modId xmlns:p14="http://schemas.microsoft.com/office/powerpoint/2010/main" val="3578938647"/>
+              </p:ext>
+            </p:extLst>
+          </p:nvPr>
+        </p:nvGraphicFramePr>
+        <p:xfrm>
+          <a:off x="1231900" y="2062812"/>
+          <a:ext cx="4222750" cy="3277538"/>
+        </p:xfrm>
+        <a:graphic>
+          <a:graphicData uri="http://schemas.openxmlformats.org/drawingml/2006/table">
+            <a:tbl>
+              <a:tblPr firstRow="1" bandRow="1">
+                <a:tableStyleId>{5C22544A-7EE6-4342-B048-85BDC9FD1C3A}</a:tableStyleId>
+              </a:tblPr>
+              <a:tblGrid>
+                <a:gridCol w="2111375">
+                  <a:extLst>
+                    <a:ext uri="{9D8B030D-6E8A-4147-A177-3AD203B41FA5}">
+                      <a16:colId xmlns:a16="http://schemas.microsoft.com/office/drawing/2014/main" val="1167554514"/>
+                    </a:ext>
+                  </a:extLst>
+                </a:gridCol>
+                <a:gridCol w="2111375">
+                  <a:extLst>
+                    <a:ext uri="{9D8B030D-6E8A-4147-A177-3AD203B41FA5}">
+                      <a16:colId xmlns:a16="http://schemas.microsoft.com/office/drawing/2014/main" val="1921543512"/>
+                    </a:ext>
+                  </a:extLst>
+                </a:gridCol>
+              </a:tblGrid>
+              <a:tr h="297958">
+                <a:tc>
+                  <a:txBody>
+                    <a:bodyPr/>
+                    <a:lstStyle/>
+                    <a:p>
+                      <a:pPr algn="ctr" latinLnBrk="1"/>
+                      <a:r>
+                        <a:rPr lang="ko-KR" altLang="en-US" sz="1200" dirty="0"/>
+                        <a:t>주</a:t>
+                      </a:r>
+                    </a:p>
+                  </a:txBody>
+                  <a:tcPr/>
+                </a:tc>
+                <a:tc>
+                  <a:txBody>
+                    <a:bodyPr/>
+                    <a:lstStyle/>
+                    <a:p>
+                      <a:pPr algn="ctr" latinLnBrk="1"/>
+                      <a:r>
+                        <a:rPr lang="ko-KR" altLang="en-US" sz="1200" dirty="0" err="1"/>
+                        <a:t>커밋</a:t>
+                      </a:r>
+                      <a:r>
+                        <a:rPr lang="ko-KR" altLang="en-US" sz="1200" dirty="0"/>
+                        <a:t> 횟수</a:t>
+                      </a:r>
+                    </a:p>
+                  </a:txBody>
+                  <a:tcPr/>
+                </a:tc>
+                <a:extLst>
+                  <a:ext uri="{0D108BD9-81ED-4DB2-BD59-A6C34878D82A}">
+                    <a16:rowId xmlns:a16="http://schemas.microsoft.com/office/drawing/2014/main" val="3256807680"/>
+                  </a:ext>
+                </a:extLst>
+              </a:tr>
+              <a:tr h="297958">
+                <a:tc>
+                  <a:txBody>
+                    <a:bodyPr/>
+                    <a:lstStyle/>
+                    <a:p>
+                      <a:pPr algn="ctr" latinLnBrk="1"/>
+                      <a:r>
+                        <a:rPr lang="en-US" altLang="ko-KR" sz="1200" dirty="0"/>
+                        <a:t>Week of 28, Sep, 2025</a:t>
+                      </a:r>
+                      <a:endParaRPr lang="ko-KR" altLang="en-US" sz="1200" dirty="0"/>
+                    </a:p>
+                  </a:txBody>
+                  <a:tcPr/>
+                </a:tc>
+                <a:tc>
+                  <a:txBody>
+                    <a:bodyPr/>
+                    <a:lstStyle/>
+                    <a:p>
+                      <a:pPr algn="ctr" latinLnBrk="1"/>
+                      <a:r>
+                        <a:rPr lang="en-US" altLang="ko-KR" sz="1200" dirty="0"/>
+                        <a:t>4</a:t>
+                      </a:r>
+                      <a:endParaRPr lang="ko-KR" altLang="en-US" sz="1200" dirty="0"/>
+                    </a:p>
+                  </a:txBody>
+                  <a:tcPr/>
+                </a:tc>
+                <a:extLst>
+                  <a:ext uri="{0D108BD9-81ED-4DB2-BD59-A6C34878D82A}">
+                    <a16:rowId xmlns:a16="http://schemas.microsoft.com/office/drawing/2014/main" val="2023343771"/>
+                  </a:ext>
+                </a:extLst>
+              </a:tr>
+              <a:tr h="297958">
+                <a:tc>
+                  <a:txBody>
+                    <a:bodyPr/>
+                    <a:lstStyle/>
+                    <a:p>
+                      <a:pPr marL="0" marR="0" lvl="0" indent="0" algn="ctr" defTabSz="914400" rtl="0" eaLnBrk="1" fontAlgn="auto" latinLnBrk="1" hangingPunct="1">
+                        <a:lnSpc>
+                          <a:spcPct val="100000"/>
+                        </a:lnSpc>
+                        <a:spcBef>
+                          <a:spcPts val="0"/>
+                        </a:spcBef>
+                        <a:spcAft>
+                          <a:spcPts val="0"/>
+                        </a:spcAft>
+                        <a:buClrTx/>
+                        <a:buSzTx/>
+                        <a:buFontTx/>
+                        <a:buNone/>
+                        <a:tabLst/>
+                        <a:defRPr/>
+                      </a:pPr>
+                      <a:r>
+                        <a:rPr lang="en-US" altLang="ko-KR" sz="1200" dirty="0"/>
+                        <a:t>Week of 12, Oct, 2025</a:t>
+                      </a:r>
+                      <a:endParaRPr lang="ko-KR" altLang="en-US" sz="1200" dirty="0"/>
+                    </a:p>
+                  </a:txBody>
+                  <a:tcPr/>
+                </a:tc>
+                <a:tc>
+                  <a:txBody>
+                    <a:bodyPr/>
+                    <a:lstStyle/>
+                    <a:p>
+                      <a:pPr algn="ctr" latinLnBrk="1"/>
+                      <a:r>
+                        <a:rPr lang="en-US" altLang="ko-KR" sz="1200" dirty="0"/>
+                        <a:t>3</a:t>
+                      </a:r>
+                      <a:endParaRPr lang="ko-KR" altLang="en-US" sz="1200" dirty="0"/>
+                    </a:p>
+                  </a:txBody>
+                  <a:tcPr/>
+                </a:tc>
+                <a:extLst>
+                  <a:ext uri="{0D108BD9-81ED-4DB2-BD59-A6C34878D82A}">
+                    <a16:rowId xmlns:a16="http://schemas.microsoft.com/office/drawing/2014/main" val="2290230162"/>
+                  </a:ext>
+                </a:extLst>
+              </a:tr>
+              <a:tr h="297958">
+                <a:tc>
+                  <a:txBody>
+                    <a:bodyPr/>
+                    <a:lstStyle/>
+                    <a:p>
+                      <a:pPr marL="0" marR="0" lvl="0" indent="0" algn="ctr" defTabSz="914400" rtl="0" eaLnBrk="1" fontAlgn="auto" latinLnBrk="1" hangingPunct="1">
+                        <a:lnSpc>
+                          <a:spcPct val="100000"/>
+                        </a:lnSpc>
+                        <a:spcBef>
+                          <a:spcPts val="0"/>
+                        </a:spcBef>
+                        <a:spcAft>
+                          <a:spcPts val="0"/>
+                        </a:spcAft>
+                        <a:buClrTx/>
+                        <a:buSzTx/>
+                        <a:buFontTx/>
+                        <a:buNone/>
+                        <a:tabLst/>
+                        <a:defRPr/>
+                      </a:pPr>
+                      <a:r>
+                        <a:rPr kumimoji="0" lang="en-US" altLang="ko-KR" sz="1200" b="0" i="0" u="none" strike="noStrike" kern="1200" cap="none" spc="0" normalizeH="0" baseline="0" noProof="0" dirty="0">
+                          <a:ln>
+                            <a:noFill/>
+                          </a:ln>
+                          <a:solidFill>
+                            <a:prstClr val="black"/>
+                          </a:solidFill>
+                          <a:effectLst/>
+                          <a:uLnTx/>
+                          <a:uFillTx/>
+                          <a:latin typeface="맑은 고딕" panose="02110004020202020204"/>
+                          <a:ea typeface="맑은 고딕" panose="020B0503020000020004" pitchFamily="50" charset="-127"/>
+                          <a:cs typeface="+mn-cs"/>
+                        </a:rPr>
+                        <a:t>Week of </a:t>
+                      </a:r>
+                      <a:r>
+                        <a:rPr lang="en-US" altLang="ko-KR" sz="1200" dirty="0"/>
+                        <a:t>19, Oct</a:t>
+                      </a:r>
+                      <a:r>
+                        <a:rPr kumimoji="0" lang="en-US" altLang="ko-KR" sz="1200" b="0" i="0" u="none" strike="noStrike" kern="1200" cap="none" spc="0" normalizeH="0" baseline="0" noProof="0" dirty="0">
+                          <a:ln>
+                            <a:noFill/>
+                          </a:ln>
+                          <a:solidFill>
+                            <a:prstClr val="black"/>
+                          </a:solidFill>
+                          <a:effectLst/>
+                          <a:uLnTx/>
+                          <a:uFillTx/>
+                          <a:latin typeface="맑은 고딕" panose="02110004020202020204"/>
+                          <a:ea typeface="맑은 고딕" panose="020B0503020000020004" pitchFamily="50" charset="-127"/>
+                          <a:cs typeface="+mn-cs"/>
+                        </a:rPr>
+                        <a:t>, 2025</a:t>
+                      </a:r>
+                      <a:endParaRPr kumimoji="0" lang="ko-KR" altLang="en-US" sz="1200" b="0" i="0" u="none" strike="noStrike" kern="1200" cap="none" spc="0" normalizeH="0" baseline="0" noProof="0" dirty="0">
+                        <a:ln>
+                          <a:noFill/>
+                        </a:ln>
+                        <a:solidFill>
+                          <a:prstClr val="black"/>
+                        </a:solidFill>
+                        <a:effectLst/>
+                        <a:uLnTx/>
+                        <a:uFillTx/>
+                        <a:latin typeface="맑은 고딕" panose="02110004020202020204"/>
+                        <a:ea typeface="맑은 고딕" panose="020B0503020000020004" pitchFamily="50" charset="-127"/>
+                        <a:cs typeface="+mn-cs"/>
+                      </a:endParaRPr>
+                    </a:p>
+                  </a:txBody>
+                  <a:tcPr/>
+                </a:tc>
+                <a:tc>
+                  <a:txBody>
+                    <a:bodyPr/>
+                    <a:lstStyle/>
+                    <a:p>
+                      <a:pPr algn="ctr" latinLnBrk="1"/>
+                      <a:r>
+                        <a:rPr lang="en-US" altLang="ko-KR" sz="1200" dirty="0"/>
+                        <a:t>10</a:t>
+                      </a:r>
+                      <a:endParaRPr lang="ko-KR" altLang="en-US" sz="1200" dirty="0"/>
+                    </a:p>
+                  </a:txBody>
+                  <a:tcPr/>
+                </a:tc>
+                <a:extLst>
+                  <a:ext uri="{0D108BD9-81ED-4DB2-BD59-A6C34878D82A}">
+                    <a16:rowId xmlns:a16="http://schemas.microsoft.com/office/drawing/2014/main" val="299452265"/>
+                  </a:ext>
+                </a:extLst>
+              </a:tr>
+              <a:tr h="297958">
+                <a:tc>
+                  <a:txBody>
+                    <a:bodyPr/>
+                    <a:lstStyle/>
+                    <a:p>
+                      <a:pPr marL="0" marR="0" lvl="0" indent="0" algn="ctr" defTabSz="914400" rtl="0" eaLnBrk="1" fontAlgn="auto" latinLnBrk="1" hangingPunct="1">
+                        <a:lnSpc>
+                          <a:spcPct val="100000"/>
+                        </a:lnSpc>
+                        <a:spcBef>
+                          <a:spcPts val="0"/>
+                        </a:spcBef>
+                        <a:spcAft>
+                          <a:spcPts val="0"/>
+                        </a:spcAft>
+                        <a:buClrTx/>
+                        <a:buSzTx/>
+                        <a:buFontTx/>
+                        <a:buNone/>
+                        <a:tabLst/>
+                        <a:defRPr/>
+                      </a:pPr>
+                      <a:r>
+                        <a:rPr kumimoji="0" lang="en-US" altLang="ko-KR" sz="1200" b="0" i="0" u="none" strike="noStrike" kern="1200" cap="none" spc="0" normalizeH="0" baseline="0" noProof="0" dirty="0">
+                          <a:ln>
+                            <a:noFill/>
+                          </a:ln>
+                          <a:solidFill>
+                            <a:prstClr val="black"/>
+                          </a:solidFill>
+                          <a:effectLst/>
+                          <a:uLnTx/>
+                          <a:uFillTx/>
+                          <a:latin typeface="맑은 고딕" panose="02110004020202020204"/>
+                          <a:ea typeface="맑은 고딕" panose="020B0503020000020004" pitchFamily="50" charset="-127"/>
+                          <a:cs typeface="+mn-cs"/>
+                        </a:rPr>
+                        <a:t>Week of 26</a:t>
+                      </a:r>
+                      <a:r>
+                        <a:rPr lang="en-US" altLang="ko-KR" sz="1200" dirty="0"/>
+                        <a:t>, Oct</a:t>
+                      </a:r>
+                      <a:r>
+                        <a:rPr kumimoji="0" lang="en-US" altLang="ko-KR" sz="1200" b="0" i="0" u="none" strike="noStrike" kern="1200" cap="none" spc="0" normalizeH="0" baseline="0" noProof="0" dirty="0">
+                          <a:ln>
+                            <a:noFill/>
+                          </a:ln>
+                          <a:solidFill>
+                            <a:prstClr val="black"/>
+                          </a:solidFill>
+                          <a:effectLst/>
+                          <a:uLnTx/>
+                          <a:uFillTx/>
+                          <a:latin typeface="맑은 고딕" panose="02110004020202020204"/>
+                          <a:ea typeface="맑은 고딕" panose="020B0503020000020004" pitchFamily="50" charset="-127"/>
+                          <a:cs typeface="+mn-cs"/>
+                        </a:rPr>
+                        <a:t>, 2025</a:t>
+                      </a:r>
+                      <a:endParaRPr kumimoji="0" lang="ko-KR" altLang="en-US" sz="1200" b="0" i="0" u="none" strike="noStrike" kern="1200" cap="none" spc="0" normalizeH="0" baseline="0" noProof="0" dirty="0">
+                        <a:ln>
+                          <a:noFill/>
+                        </a:ln>
+                        <a:solidFill>
+                          <a:prstClr val="black"/>
+                        </a:solidFill>
+                        <a:effectLst/>
+                        <a:uLnTx/>
+                        <a:uFillTx/>
+                        <a:latin typeface="맑은 고딕" panose="02110004020202020204"/>
+                        <a:ea typeface="맑은 고딕" panose="020B0503020000020004" pitchFamily="50" charset="-127"/>
+                        <a:cs typeface="+mn-cs"/>
+                      </a:endParaRPr>
+                    </a:p>
+                  </a:txBody>
+                  <a:tcPr/>
+                </a:tc>
+                <a:tc>
+                  <a:txBody>
+                    <a:bodyPr/>
+                    <a:lstStyle/>
+                    <a:p>
+                      <a:pPr algn="ctr" latinLnBrk="1"/>
+                      <a:r>
+                        <a:rPr lang="en-US" altLang="ko-KR" sz="1200" dirty="0"/>
+                        <a:t>17</a:t>
+                      </a:r>
+                      <a:endParaRPr lang="ko-KR" altLang="en-US" sz="1200" dirty="0"/>
+                    </a:p>
+                  </a:txBody>
+                  <a:tcPr/>
+                </a:tc>
+                <a:extLst>
+                  <a:ext uri="{0D108BD9-81ED-4DB2-BD59-A6C34878D82A}">
+                    <a16:rowId xmlns:a16="http://schemas.microsoft.com/office/drawing/2014/main" val="2068997829"/>
+                  </a:ext>
+                </a:extLst>
+              </a:tr>
+              <a:tr h="297958">
+                <a:tc>
+                  <a:txBody>
+                    <a:bodyPr/>
+                    <a:lstStyle/>
+                    <a:p>
+                      <a:pPr marL="0" marR="0" lvl="0" indent="0" algn="ctr" defTabSz="914400" rtl="0" eaLnBrk="1" fontAlgn="auto" latinLnBrk="1" hangingPunct="1">
+                        <a:lnSpc>
+                          <a:spcPct val="100000"/>
+                        </a:lnSpc>
+                        <a:spcBef>
+                          <a:spcPts val="0"/>
+                        </a:spcBef>
+                        <a:spcAft>
+                          <a:spcPts val="0"/>
+                        </a:spcAft>
+                        <a:buClrTx/>
+                        <a:buSzTx/>
+                        <a:buFontTx/>
+                        <a:buNone/>
+                        <a:tabLst/>
+                        <a:defRPr/>
+                      </a:pPr>
+                      <a:r>
+                        <a:rPr kumimoji="0" lang="en-US" altLang="ko-KR" sz="1200" b="0" i="0" u="none" strike="noStrike" kern="1200" cap="none" spc="0" normalizeH="0" baseline="0" noProof="0" dirty="0">
+                          <a:ln>
+                            <a:noFill/>
+                          </a:ln>
+                          <a:solidFill>
+                            <a:prstClr val="black"/>
+                          </a:solidFill>
+                          <a:effectLst/>
+                          <a:uLnTx/>
+                          <a:uFillTx/>
+                          <a:latin typeface="맑은 고딕" panose="02110004020202020204"/>
+                          <a:ea typeface="맑은 고딕" panose="020B0503020000020004" pitchFamily="50" charset="-127"/>
+                          <a:cs typeface="+mn-cs"/>
+                        </a:rPr>
+                        <a:t>Week of 2, Nov, 2025</a:t>
+                      </a:r>
+                      <a:endParaRPr kumimoji="0" lang="ko-KR" altLang="en-US" sz="1200" b="0" i="0" u="none" strike="noStrike" kern="1200" cap="none" spc="0" normalizeH="0" baseline="0" noProof="0" dirty="0">
+                        <a:ln>
+                          <a:noFill/>
+                        </a:ln>
+                        <a:solidFill>
+                          <a:prstClr val="black"/>
+                        </a:solidFill>
+                        <a:effectLst/>
+                        <a:uLnTx/>
+                        <a:uFillTx/>
+                        <a:latin typeface="맑은 고딕" panose="02110004020202020204"/>
+                        <a:ea typeface="맑은 고딕" panose="020B0503020000020004" pitchFamily="50" charset="-127"/>
+                        <a:cs typeface="+mn-cs"/>
+                      </a:endParaRPr>
+                    </a:p>
+                  </a:txBody>
+                  <a:tcPr/>
+                </a:tc>
+                <a:tc>
+                  <a:txBody>
+                    <a:bodyPr/>
+                    <a:lstStyle/>
+                    <a:p>
+                      <a:pPr algn="ctr" latinLnBrk="1"/>
+                      <a:r>
+                        <a:rPr lang="en-US" altLang="ko-KR" sz="1200" dirty="0"/>
+                        <a:t>7</a:t>
+                      </a:r>
+                      <a:endParaRPr lang="ko-KR" altLang="en-US" sz="1200" dirty="0"/>
+                    </a:p>
+                  </a:txBody>
+                  <a:tcPr/>
+                </a:tc>
+                <a:extLst>
+                  <a:ext uri="{0D108BD9-81ED-4DB2-BD59-A6C34878D82A}">
+                    <a16:rowId xmlns:a16="http://schemas.microsoft.com/office/drawing/2014/main" val="3589499531"/>
+                  </a:ext>
+                </a:extLst>
+              </a:tr>
+              <a:tr h="297958">
+                <a:tc>
+                  <a:txBody>
+                    <a:bodyPr/>
+                    <a:lstStyle/>
+                    <a:p>
+                      <a:pPr marL="0" marR="0" lvl="0" indent="0" algn="ctr" defTabSz="914400" rtl="0" eaLnBrk="1" fontAlgn="auto" latinLnBrk="1" hangingPunct="1">
+                        <a:lnSpc>
+                          <a:spcPct val="100000"/>
+                        </a:lnSpc>
+                        <a:spcBef>
+                          <a:spcPts val="0"/>
+                        </a:spcBef>
+                        <a:spcAft>
+                          <a:spcPts val="0"/>
+                        </a:spcAft>
+                        <a:buClrTx/>
+                        <a:buSzTx/>
+                        <a:buFontTx/>
+                        <a:buNone/>
+                        <a:tabLst/>
+                        <a:defRPr/>
+                      </a:pPr>
+                      <a:r>
+                        <a:rPr kumimoji="0" lang="en-US" altLang="ko-KR" sz="1200" b="0" i="0" u="none" strike="noStrike" kern="1200" cap="none" spc="0" normalizeH="0" baseline="0" noProof="0" dirty="0">
+                          <a:ln>
+                            <a:noFill/>
+                          </a:ln>
+                          <a:solidFill>
+                            <a:prstClr val="black"/>
+                          </a:solidFill>
+                          <a:effectLst/>
+                          <a:uLnTx/>
+                          <a:uFillTx/>
+                          <a:latin typeface="맑은 고딕" panose="02110004020202020204"/>
+                          <a:ea typeface="맑은 고딕" panose="020B0503020000020004" pitchFamily="50" charset="-127"/>
+                          <a:cs typeface="+mn-cs"/>
+                        </a:rPr>
+                        <a:t>Week </a:t>
+                      </a:r>
+                      <a:r>
+                        <a:rPr kumimoji="0" lang="en-US" altLang="ko-KR" sz="1200" b="0" i="0" u="none" strike="noStrike" kern="1200" cap="none" spc="0" normalizeH="0" baseline="0" noProof="0" dirty="0">
+                          <a:ln>
+                            <a:noFill/>
+                          </a:ln>
+                          <a:solidFill>
+                            <a:prstClr val="black"/>
+                          </a:solidFill>
+                          <a:effectLst/>
+                          <a:uLnTx/>
+                          <a:uFillTx/>
+                          <a:latin typeface="+mn-lt"/>
+                          <a:ea typeface="+mn-ea"/>
+                          <a:cs typeface="+mn-cs"/>
+                        </a:rPr>
+                        <a:t>of 9, Nov, </a:t>
+                      </a:r>
+                      <a:r>
+                        <a:rPr kumimoji="0" lang="en-US" altLang="ko-KR" sz="1200" b="0" i="0" u="none" strike="noStrike" kern="1200" cap="none" spc="0" normalizeH="0" baseline="0" noProof="0" dirty="0">
+                          <a:ln>
+                            <a:noFill/>
+                          </a:ln>
+                          <a:solidFill>
+                            <a:prstClr val="black"/>
+                          </a:solidFill>
+                          <a:effectLst/>
+                          <a:uLnTx/>
+                          <a:uFillTx/>
+                          <a:latin typeface="맑은 고딕" panose="02110004020202020204"/>
+                          <a:ea typeface="맑은 고딕" panose="020B0503020000020004" pitchFamily="50" charset="-127"/>
+                          <a:cs typeface="+mn-cs"/>
+                        </a:rPr>
+                        <a:t>2025</a:t>
+                      </a:r>
+                      <a:endParaRPr kumimoji="0" lang="ko-KR" altLang="en-US" sz="1200" b="0" i="0" u="none" strike="noStrike" kern="1200" cap="none" spc="0" normalizeH="0" baseline="0" noProof="0" dirty="0">
+                        <a:ln>
+                          <a:noFill/>
+                        </a:ln>
+                        <a:solidFill>
+                          <a:prstClr val="black"/>
+                        </a:solidFill>
+                        <a:effectLst/>
+                        <a:uLnTx/>
+                        <a:uFillTx/>
+                        <a:latin typeface="맑은 고딕" panose="02110004020202020204"/>
+                        <a:ea typeface="맑은 고딕" panose="020B0503020000020004" pitchFamily="50" charset="-127"/>
+                        <a:cs typeface="+mn-cs"/>
+                      </a:endParaRPr>
+                    </a:p>
+                  </a:txBody>
+                  <a:tcPr/>
+                </a:tc>
+                <a:tc>
+                  <a:txBody>
+                    <a:bodyPr/>
+                    <a:lstStyle/>
+                    <a:p>
+                      <a:pPr algn="ctr" latinLnBrk="1"/>
+                      <a:r>
+                        <a:rPr lang="en-US" altLang="ko-KR" sz="1200" dirty="0"/>
+                        <a:t>17</a:t>
+                      </a:r>
+                      <a:endParaRPr lang="ko-KR" altLang="en-US" sz="1200" dirty="0"/>
+                    </a:p>
+                  </a:txBody>
+                  <a:tcPr/>
+                </a:tc>
+                <a:extLst>
+                  <a:ext uri="{0D108BD9-81ED-4DB2-BD59-A6C34878D82A}">
+                    <a16:rowId xmlns:a16="http://schemas.microsoft.com/office/drawing/2014/main" val="3134286504"/>
+                  </a:ext>
+                </a:extLst>
+              </a:tr>
+              <a:tr h="297958">
+                <a:tc>
+                  <a:txBody>
+                    <a:bodyPr/>
+                    <a:lstStyle/>
+                    <a:p>
+                      <a:pPr marL="0" marR="0" lvl="0" indent="0" algn="ctr" defTabSz="914400" rtl="0" eaLnBrk="1" fontAlgn="auto" latinLnBrk="1" hangingPunct="1">
+                        <a:lnSpc>
+                          <a:spcPct val="100000"/>
+                        </a:lnSpc>
+                        <a:spcBef>
+                          <a:spcPts val="0"/>
+                        </a:spcBef>
+                        <a:spcAft>
+                          <a:spcPts val="0"/>
+                        </a:spcAft>
+                        <a:buClrTx/>
+                        <a:buSzTx/>
+                        <a:buFontTx/>
+                        <a:buNone/>
+                        <a:tabLst/>
+                        <a:defRPr/>
+                      </a:pPr>
+                      <a:r>
+                        <a:rPr kumimoji="0" lang="en-US" altLang="ko-KR" sz="1200" b="0" i="0" u="none" strike="noStrike" kern="1200" cap="none" spc="0" normalizeH="0" baseline="0" noProof="0" dirty="0">
+                          <a:ln>
+                            <a:noFill/>
+                          </a:ln>
+                          <a:solidFill>
+                            <a:prstClr val="black"/>
+                          </a:solidFill>
+                          <a:effectLst/>
+                          <a:uLnTx/>
+                          <a:uFillTx/>
+                          <a:latin typeface="맑은 고딕" panose="02110004020202020204"/>
+                          <a:ea typeface="맑은 고딕" panose="020B0503020000020004" pitchFamily="50" charset="-127"/>
+                          <a:cs typeface="+mn-cs"/>
+                        </a:rPr>
+                        <a:t>Week </a:t>
+                      </a:r>
+                      <a:r>
+                        <a:rPr kumimoji="0" lang="en-US" altLang="ko-KR" sz="1200" b="0" i="0" u="none" strike="noStrike" kern="1200" cap="none" spc="0" normalizeH="0" baseline="0" noProof="0" dirty="0">
+                          <a:ln>
+                            <a:noFill/>
+                          </a:ln>
+                          <a:solidFill>
+                            <a:prstClr val="black"/>
+                          </a:solidFill>
+                          <a:effectLst/>
+                          <a:uLnTx/>
+                          <a:uFillTx/>
+                          <a:latin typeface="+mn-lt"/>
+                          <a:ea typeface="+mn-ea"/>
+                          <a:cs typeface="+mn-cs"/>
+                        </a:rPr>
+                        <a:t>of 16, Nov, </a:t>
+                      </a:r>
+                      <a:r>
+                        <a:rPr kumimoji="0" lang="en-US" altLang="ko-KR" sz="1200" b="0" i="0" u="none" strike="noStrike" kern="1200" cap="none" spc="0" normalizeH="0" baseline="0" noProof="0" dirty="0">
+                          <a:ln>
+                            <a:noFill/>
+                          </a:ln>
+                          <a:solidFill>
+                            <a:prstClr val="black"/>
+                          </a:solidFill>
+                          <a:effectLst/>
+                          <a:uLnTx/>
+                          <a:uFillTx/>
+                          <a:latin typeface="맑은 고딕" panose="02110004020202020204"/>
+                          <a:ea typeface="맑은 고딕" panose="020B0503020000020004" pitchFamily="50" charset="-127"/>
+                          <a:cs typeface="+mn-cs"/>
+                        </a:rPr>
+                        <a:t>2025</a:t>
+                      </a:r>
+                      <a:endParaRPr kumimoji="0" lang="ko-KR" altLang="en-US" sz="1200" b="0" i="0" u="none" strike="noStrike" kern="1200" cap="none" spc="0" normalizeH="0" baseline="0" noProof="0" dirty="0">
+                        <a:ln>
+                          <a:noFill/>
+                        </a:ln>
+                        <a:solidFill>
+                          <a:prstClr val="black"/>
+                        </a:solidFill>
+                        <a:effectLst/>
+                        <a:uLnTx/>
+                        <a:uFillTx/>
+                        <a:latin typeface="맑은 고딕" panose="02110004020202020204"/>
+                        <a:ea typeface="맑은 고딕" panose="020B0503020000020004" pitchFamily="50" charset="-127"/>
+                        <a:cs typeface="+mn-cs"/>
+                      </a:endParaRPr>
+                    </a:p>
+                  </a:txBody>
+                  <a:tcPr/>
+                </a:tc>
+                <a:tc>
+                  <a:txBody>
+                    <a:bodyPr/>
+                    <a:lstStyle/>
+                    <a:p>
+                      <a:pPr algn="ctr" latinLnBrk="1"/>
+                      <a:r>
+                        <a:rPr lang="en-US" altLang="ko-KR" sz="1200" dirty="0"/>
+                        <a:t>18</a:t>
+                      </a:r>
+                      <a:endParaRPr lang="ko-KR" altLang="en-US" sz="1200" dirty="0"/>
+                    </a:p>
+                  </a:txBody>
+                  <a:tcPr/>
+                </a:tc>
+                <a:extLst>
+                  <a:ext uri="{0D108BD9-81ED-4DB2-BD59-A6C34878D82A}">
+                    <a16:rowId xmlns:a16="http://schemas.microsoft.com/office/drawing/2014/main" val="4092201501"/>
+                  </a:ext>
+                </a:extLst>
+              </a:tr>
+              <a:tr h="297958">
+                <a:tc>
+                  <a:txBody>
+                    <a:bodyPr/>
+                    <a:lstStyle/>
+                    <a:p>
+                      <a:pPr marL="0" marR="0" lvl="0" indent="0" algn="ctr" defTabSz="914400" rtl="0" eaLnBrk="1" fontAlgn="auto" latinLnBrk="1" hangingPunct="1">
+                        <a:lnSpc>
+                          <a:spcPct val="100000"/>
+                        </a:lnSpc>
+                        <a:spcBef>
+                          <a:spcPts val="0"/>
+                        </a:spcBef>
+                        <a:spcAft>
+                          <a:spcPts val="0"/>
+                        </a:spcAft>
+                        <a:buClrTx/>
+                        <a:buSzTx/>
+                        <a:buFontTx/>
+                        <a:buNone/>
+                        <a:tabLst/>
+                        <a:defRPr/>
+                      </a:pPr>
+                      <a:r>
+                        <a:rPr kumimoji="0" lang="en-US" altLang="ko-KR" sz="1200" b="0" i="0" u="none" strike="noStrike" kern="1200" cap="none" spc="0" normalizeH="0" baseline="0" noProof="0" dirty="0">
+                          <a:ln>
+                            <a:noFill/>
+                          </a:ln>
+                          <a:solidFill>
+                            <a:prstClr val="black"/>
+                          </a:solidFill>
+                          <a:effectLst/>
+                          <a:uLnTx/>
+                          <a:uFillTx/>
+                          <a:latin typeface="맑은 고딕" panose="02110004020202020204"/>
+                          <a:ea typeface="맑은 고딕" panose="020B0503020000020004" pitchFamily="50" charset="-127"/>
+                          <a:cs typeface="+mn-cs"/>
+                        </a:rPr>
+                        <a:t>Week </a:t>
+                      </a:r>
+                      <a:r>
+                        <a:rPr kumimoji="0" lang="en-US" altLang="ko-KR" sz="1200" b="0" i="0" u="none" strike="noStrike" kern="1200" cap="none" spc="0" normalizeH="0" baseline="0" noProof="0" dirty="0">
+                          <a:ln>
+                            <a:noFill/>
+                          </a:ln>
+                          <a:solidFill>
+                            <a:prstClr val="black"/>
+                          </a:solidFill>
+                          <a:effectLst/>
+                          <a:uLnTx/>
+                          <a:uFillTx/>
+                          <a:latin typeface="+mn-lt"/>
+                          <a:ea typeface="+mn-ea"/>
+                          <a:cs typeface="+mn-cs"/>
+                        </a:rPr>
+                        <a:t>of 23, Nov, </a:t>
+                      </a:r>
+                      <a:r>
+                        <a:rPr kumimoji="0" lang="en-US" altLang="ko-KR" sz="1200" b="0" i="0" u="none" strike="noStrike" kern="1200" cap="none" spc="0" normalizeH="0" baseline="0" noProof="0" dirty="0">
+                          <a:ln>
+                            <a:noFill/>
+                          </a:ln>
+                          <a:solidFill>
+                            <a:prstClr val="black"/>
+                          </a:solidFill>
+                          <a:effectLst/>
+                          <a:uLnTx/>
+                          <a:uFillTx/>
+                          <a:latin typeface="맑은 고딕" panose="02110004020202020204"/>
+                          <a:ea typeface="맑은 고딕" panose="020B0503020000020004" pitchFamily="50" charset="-127"/>
+                          <a:cs typeface="+mn-cs"/>
+                        </a:rPr>
+                        <a:t>2025</a:t>
+                      </a:r>
+                      <a:endParaRPr kumimoji="0" lang="ko-KR" altLang="en-US" sz="1200" b="0" i="0" u="none" strike="noStrike" kern="1200" cap="none" spc="0" normalizeH="0" baseline="0" noProof="0" dirty="0">
+                        <a:ln>
+                          <a:noFill/>
+                        </a:ln>
+                        <a:solidFill>
+                          <a:prstClr val="black"/>
+                        </a:solidFill>
+                        <a:effectLst/>
+                        <a:uLnTx/>
+                        <a:uFillTx/>
+                        <a:latin typeface="맑은 고딕" panose="02110004020202020204"/>
+                        <a:ea typeface="맑은 고딕" panose="020B0503020000020004" pitchFamily="50" charset="-127"/>
+                        <a:cs typeface="+mn-cs"/>
+                      </a:endParaRPr>
+                    </a:p>
+                  </a:txBody>
+                  <a:tcPr/>
+                </a:tc>
+                <a:tc>
+                  <a:txBody>
+                    <a:bodyPr/>
+                    <a:lstStyle/>
+                    <a:p>
+                      <a:pPr algn="ctr" latinLnBrk="1"/>
+                      <a:r>
+                        <a:rPr lang="en-US" altLang="ko-KR" sz="1200" dirty="0"/>
+                        <a:t>8</a:t>
+                      </a:r>
+                      <a:endParaRPr lang="ko-KR" altLang="en-US" sz="1200" dirty="0"/>
+                    </a:p>
+                  </a:txBody>
+                  <a:tcPr/>
+                </a:tc>
+                <a:extLst>
+                  <a:ext uri="{0D108BD9-81ED-4DB2-BD59-A6C34878D82A}">
+                    <a16:rowId xmlns:a16="http://schemas.microsoft.com/office/drawing/2014/main" val="3348620838"/>
+                  </a:ext>
+                </a:extLst>
+              </a:tr>
+              <a:tr h="297958">
+                <a:tc>
+                  <a:txBody>
+                    <a:bodyPr/>
+                    <a:lstStyle/>
+                    <a:p>
+                      <a:pPr marL="0" marR="0" lvl="0" indent="0" algn="ctr" defTabSz="914400" rtl="0" eaLnBrk="1" fontAlgn="auto" latinLnBrk="1" hangingPunct="1">
+                        <a:lnSpc>
+                          <a:spcPct val="100000"/>
+                        </a:lnSpc>
+                        <a:spcBef>
+                          <a:spcPts val="0"/>
+                        </a:spcBef>
+                        <a:spcAft>
+                          <a:spcPts val="0"/>
+                        </a:spcAft>
+                        <a:buClrTx/>
+                        <a:buSzTx/>
+                        <a:buFontTx/>
+                        <a:buNone/>
+                        <a:tabLst/>
+                        <a:defRPr/>
+                      </a:pPr>
+                      <a:r>
+                        <a:rPr kumimoji="0" lang="en-US" altLang="ko-KR" sz="1200" b="0" i="0" u="none" strike="noStrike" kern="1200" cap="none" spc="0" normalizeH="0" baseline="0" noProof="0" dirty="0">
+                          <a:ln>
+                            <a:noFill/>
+                          </a:ln>
+                          <a:solidFill>
+                            <a:prstClr val="black"/>
+                          </a:solidFill>
+                          <a:effectLst/>
+                          <a:uLnTx/>
+                          <a:uFillTx/>
+                          <a:latin typeface="맑은 고딕" panose="02110004020202020204"/>
+                          <a:ea typeface="맑은 고딕" panose="020B0503020000020004" pitchFamily="50" charset="-127"/>
+                          <a:cs typeface="+mn-cs"/>
+                        </a:rPr>
+                        <a:t>Week </a:t>
+                      </a:r>
+                      <a:r>
+                        <a:rPr kumimoji="0" lang="en-US" altLang="ko-KR" sz="1200" b="0" i="0" u="none" strike="noStrike" kern="1200" cap="none" spc="0" normalizeH="0" baseline="0" noProof="0" dirty="0">
+                          <a:ln>
+                            <a:noFill/>
+                          </a:ln>
+                          <a:solidFill>
+                            <a:prstClr val="black"/>
+                          </a:solidFill>
+                          <a:effectLst/>
+                          <a:uLnTx/>
+                          <a:uFillTx/>
+                          <a:latin typeface="+mn-lt"/>
+                          <a:ea typeface="+mn-ea"/>
+                          <a:cs typeface="+mn-cs"/>
+                        </a:rPr>
+                        <a:t>of 30, Nov, 2025</a:t>
+                      </a:r>
+                      <a:endParaRPr kumimoji="0" lang="ko-KR" altLang="en-US" sz="1200" b="0" i="0" u="none" strike="noStrike" kern="1200" cap="none" spc="0" normalizeH="0" baseline="0" noProof="0" dirty="0">
+                        <a:ln>
+                          <a:noFill/>
+                        </a:ln>
+                        <a:solidFill>
+                          <a:prstClr val="black"/>
+                        </a:solidFill>
+                        <a:effectLst/>
+                        <a:uLnTx/>
+                        <a:uFillTx/>
+                        <a:latin typeface="맑은 고딕" panose="02110004020202020204"/>
+                        <a:ea typeface="맑은 고딕" panose="020B0503020000020004" pitchFamily="50" charset="-127"/>
+                        <a:cs typeface="+mn-cs"/>
+                      </a:endParaRPr>
+                    </a:p>
+                  </a:txBody>
+                  <a:tcPr/>
+                </a:tc>
+                <a:tc>
+                  <a:txBody>
+                    <a:bodyPr/>
+                    <a:lstStyle/>
+                    <a:p>
+                      <a:pPr algn="ctr" latinLnBrk="1"/>
+                      <a:r>
+                        <a:rPr lang="en-US" altLang="ko-KR" sz="1200" dirty="0"/>
+                        <a:t>38</a:t>
+                      </a:r>
+                      <a:endParaRPr lang="ko-KR" altLang="en-US" sz="1200" dirty="0"/>
+                    </a:p>
+                  </a:txBody>
+                  <a:tcPr/>
+                </a:tc>
+                <a:extLst>
+                  <a:ext uri="{0D108BD9-81ED-4DB2-BD59-A6C34878D82A}">
+                    <a16:rowId xmlns:a16="http://schemas.microsoft.com/office/drawing/2014/main" val="3581479912"/>
+                  </a:ext>
+                </a:extLst>
+              </a:tr>
+              <a:tr h="297958">
+                <a:tc>
+                  <a:txBody>
+                    <a:bodyPr/>
+                    <a:lstStyle/>
+                    <a:p>
+                      <a:pPr marL="0" marR="0" lvl="0" indent="0" algn="ctr" defTabSz="914400" rtl="0" eaLnBrk="1" fontAlgn="auto" latinLnBrk="1" hangingPunct="1">
+                        <a:lnSpc>
+                          <a:spcPct val="100000"/>
+                        </a:lnSpc>
+                        <a:spcBef>
+                          <a:spcPts val="0"/>
+                        </a:spcBef>
+                        <a:spcAft>
+                          <a:spcPts val="0"/>
+                        </a:spcAft>
+                        <a:buClrTx/>
+                        <a:buSzTx/>
+                        <a:buFontTx/>
+                        <a:buNone/>
+                        <a:tabLst/>
+                        <a:defRPr/>
+                      </a:pPr>
+                      <a:r>
+                        <a:rPr kumimoji="0" lang="en-US" altLang="ko-KR" sz="1200" b="0" i="0" u="none" strike="noStrike" kern="1200" cap="none" spc="0" normalizeH="0" baseline="0" noProof="0" dirty="0">
+                          <a:ln>
+                            <a:noFill/>
+                          </a:ln>
+                          <a:solidFill>
+                            <a:prstClr val="black"/>
+                          </a:solidFill>
+                          <a:effectLst/>
+                          <a:uLnTx/>
+                          <a:uFillTx/>
+                          <a:latin typeface="맑은 고딕" panose="02110004020202020204"/>
+                          <a:ea typeface="맑은 고딕" panose="020B0503020000020004" pitchFamily="50" charset="-127"/>
+                          <a:cs typeface="+mn-cs"/>
+                        </a:rPr>
+                        <a:t>Week of 7, Dec, 2025</a:t>
+                      </a:r>
+                      <a:endParaRPr kumimoji="0" lang="ko-KR" altLang="en-US" sz="1200" b="0" i="0" u="none" strike="noStrike" kern="1200" cap="none" spc="0" normalizeH="0" baseline="0" noProof="0" dirty="0">
+                        <a:ln>
+                          <a:noFill/>
+                        </a:ln>
+                        <a:solidFill>
+                          <a:prstClr val="black"/>
+                        </a:solidFill>
+                        <a:effectLst/>
+                        <a:uLnTx/>
+                        <a:uFillTx/>
+                        <a:latin typeface="맑은 고딕" panose="02110004020202020204"/>
+                        <a:ea typeface="맑은 고딕" panose="020B0503020000020004" pitchFamily="50" charset="-127"/>
+                        <a:cs typeface="+mn-cs"/>
+                      </a:endParaRPr>
+                    </a:p>
+                  </a:txBody>
+                  <a:tcPr/>
+                </a:tc>
+                <a:tc>
+                  <a:txBody>
+                    <a:bodyPr/>
+                    <a:lstStyle/>
+                    <a:p>
+                      <a:pPr algn="ctr" latinLnBrk="1"/>
+                      <a:r>
+                        <a:rPr lang="en-US" altLang="ko-KR" sz="1200" dirty="0"/>
+                        <a:t>35</a:t>
+                      </a:r>
+                      <a:endParaRPr lang="ko-KR" altLang="en-US" sz="1200" dirty="0"/>
+                    </a:p>
+                  </a:txBody>
+                  <a:tcPr/>
+                </a:tc>
+                <a:extLst>
+                  <a:ext uri="{0D108BD9-81ED-4DB2-BD59-A6C34878D82A}">
+                    <a16:rowId xmlns:a16="http://schemas.microsoft.com/office/drawing/2014/main" val="3493537211"/>
+                  </a:ext>
+                </a:extLst>
+              </a:tr>
+            </a:tbl>
+          </a:graphicData>
+        </a:graphic>
+      </p:graphicFrame>
     </p:spTree>
     <p:extLst>
       <p:ext uri="{BB962C8B-B14F-4D97-AF65-F5344CB8AC3E}">
